--- a/figures/ppt/fig2_vessel.pptx
+++ b/figures/ppt/fig2_vessel.pptx
@@ -7,7 +7,7 @@
   <p:sldIdLst>
     <p:sldId id="256" r:id="rId7"/>
   </p:sldIdLst>
-  <p:sldSz cx="6547104" cy="2103120" type="screen4x3"/>
+  <p:sldSz cx="6547104" cy="1792224" type="screen4x3"/>
   <p:notesSz cx="6858000" cy="9144000"/>
   <p:defaultTextStyle>
     <a:defPPr>
@@ -3120,7 +3120,7 @@
         </p:nvSpPr>
         <p:spPr>
           <a:xfrm>
-            <a:off x="3456432" y="566928"/>
+            <a:off x="3456432" y="182880"/>
             <a:ext cx="3054096" cy="1335024"/>
           </a:xfrm>
           <a:prstGeom prst="roundRect">
@@ -3167,8 +3167,8 @@
         </p:nvSpPr>
         <p:spPr>
           <a:xfrm>
-            <a:off x="5029200" y="429768"/>
-            <a:ext cx="1463040" cy="118872"/>
+            <a:off x="5029200" y="201168"/>
+            <a:ext cx="1426464" cy="118872"/>
           </a:xfrm>
           <a:prstGeom prst="rect">
             <a:avLst/>
@@ -3200,7 +3200,7 @@
       </p:sp>
       <p:pic>
         <p:nvPicPr>
-          <p:cNvPr id="5" name="control_pc" descr="control_pc_laptop.jpg"/>
+          <p:cNvPr id="5" name="plc" descr="plc.jpg"/>
           <p:cNvPicPr>
             <a:picLocks noChangeAspect="1"/>
           </p:cNvPicPr>
@@ -3214,8 +3214,8 @@
         </p:blipFill>
         <p:spPr>
           <a:xfrm>
-            <a:off x="3621024" y="36576"/>
-            <a:ext cx="403411" cy="457200"/>
+            <a:off x="3566160" y="512064"/>
+            <a:ext cx="475488" cy="442798"/>
           </a:xfrm>
           <a:prstGeom prst="rect">
             <a:avLst/>
@@ -3224,92 +3224,13 @@
       </p:pic>
       <p:sp>
         <p:nvSpPr>
-          <p:cNvPr id="6" name="TextBox 5"/>
-          <p:cNvSpPr txBox="1"/>
-          <p:nvPr/>
-        </p:nvSpPr>
-        <p:spPr>
-          <a:xfrm>
-            <a:off x="4079299" y="73152"/>
-            <a:ext cx="914400" cy="310896"/>
-          </a:xfrm>
-          <a:prstGeom prst="rect">
-            <a:avLst/>
-          </a:prstGeom>
-          <a:noFill/>
-        </p:spPr>
-        <p:txBody>
-          <a:bodyPr wrap="none" lIns="0" rIns="0" tIns="0" bIns="0" anchor="ctr">
-            <a:noAutofit/>
-          </a:bodyPr>
-          <a:lstStyle/>
-          <a:p>
-            <a:pPr algn="l">
-              <a:lnSpc>
-                <a:spcPct val="105000"/>
-              </a:lnSpc>
-            </a:pPr>
-            <a:r>
-              <a:rPr sz="660" b="1" i="0">
-                <a:solidFill>
-                  <a:srgbClr val="000000"/>
-                </a:solidFill>
-                <a:latin typeface="Times New Roman"/>
-              </a:rPr>
-              <a:t>Control PC</a:t>
-            </a:r>
-          </a:p>
-          <a:p>
-            <a:pPr algn="l">
-              <a:lnSpc>
-                <a:spcPct val="105000"/>
-              </a:lnSpc>
-            </a:pPr>
-            <a:r>
-              <a:rPr sz="660" b="0" i="0">
-                <a:solidFill>
-                  <a:srgbClr val="000000"/>
-                </a:solidFill>
-                <a:latin typeface="Times New Roman"/>
-              </a:rPr>
-              <a:t>ROS 2</a:t>
-            </a:r>
-          </a:p>
-        </p:txBody>
-      </p:sp>
-      <p:pic>
-        <p:nvPicPr>
-          <p:cNvPr id="7" name="plc" descr="plc.jpg"/>
-          <p:cNvPicPr>
-            <a:picLocks noChangeAspect="1"/>
-          </p:cNvPicPr>
-          <p:nvPr/>
-        </p:nvPicPr>
-        <p:blipFill>
-          <a:blip r:embed="rId4"/>
-          <a:stretch>
-            <a:fillRect/>
-          </a:stretch>
-        </p:blipFill>
-        <p:spPr>
-          <a:xfrm>
-            <a:off x="3566160" y="804672"/>
-            <a:ext cx="475488" cy="442798"/>
-          </a:xfrm>
-          <a:prstGeom prst="rect">
-            <a:avLst/>
-          </a:prstGeom>
-        </p:spPr>
-      </p:pic>
-      <p:sp>
-        <p:nvSpPr>
-          <p:cNvPr id="8" name="Rounded Rectangle 7"/>
+          <p:cNvPr id="6" name="Rounded Rectangle 5"/>
           <p:cNvSpPr/>
           <p:nvPr/>
         </p:nvSpPr>
         <p:spPr>
           <a:xfrm>
-            <a:off x="3566160" y="804672"/>
+            <a:off x="3566160" y="512064"/>
             <a:ext cx="475488" cy="442798"/>
           </a:xfrm>
           <a:prstGeom prst="roundRect">
@@ -3349,14 +3270,14 @@
       </p:sp>
       <p:sp>
         <p:nvSpPr>
-          <p:cNvPr id="9" name="TextBox 8"/>
+          <p:cNvPr id="7" name="TextBox 6"/>
           <p:cNvSpPr txBox="1"/>
           <p:nvPr/>
         </p:nvSpPr>
         <p:spPr>
           <a:xfrm>
-            <a:off x="3474720" y="1265758"/>
-            <a:ext cx="658368" cy="118872"/>
+            <a:off x="3547872" y="973150"/>
+            <a:ext cx="585216" cy="118872"/>
           </a:xfrm>
           <a:prstGeom prst="rect">
             <a:avLst/>
@@ -3386,6 +3307,134 @@
           </a:p>
         </p:txBody>
       </p:sp>
+      <p:sp>
+        <p:nvSpPr>
+          <p:cNvPr id="8" name="Freeform 7"/>
+          <p:cNvSpPr/>
+          <p:nvPr/>
+        </p:nvSpPr>
+        <p:spPr>
+          <a:xfrm>
+            <a:off x="3010962" y="733463"/>
+            <a:ext cx="555198" cy="414370"/>
+          </a:xfrm>
+          <a:custGeom>
+            <a:avLst/>
+            <a:gdLst/>
+            <a:ahLst/>
+            <a:cxnLst/>
+            <a:rect l="l" t="t" r="r" b="b"/>
+            <a:pathLst>
+              <a:path w="555198" h="414370">
+                <a:moveTo>
+                  <a:pt x="0" y="414370"/>
+                </a:moveTo>
+                <a:lnTo>
+                  <a:pt x="500334" y="414370"/>
+                </a:lnTo>
+                <a:lnTo>
+                  <a:pt x="500334" y="0"/>
+                </a:lnTo>
+                <a:lnTo>
+                  <a:pt x="555198" y="0"/>
+                </a:lnTo>
+              </a:path>
+            </a:pathLst>
+          </a:custGeom>
+          <a:noFill/>
+          <a:ln w="16510">
+            <a:solidFill>
+              <a:srgbClr val="00A0E0"/>
+            </a:solidFill>
+            <a:tailEnd type="triangle" w="sm" len="sm"/>
+          </a:ln>
+          <a:effectLst/>
+        </p:spPr>
+        <p:style>
+          <a:lnRef idx="1">
+            <a:schemeClr val="accent1"/>
+          </a:lnRef>
+          <a:fillRef idx="3">
+            <a:schemeClr val="accent1"/>
+          </a:fillRef>
+          <a:effectRef idx="2">
+            <a:schemeClr val="accent1"/>
+          </a:effectRef>
+          <a:fontRef idx="minor">
+            <a:schemeClr val="lt1"/>
+          </a:fontRef>
+        </p:style>
+        <p:txBody>
+          <a:bodyPr rtlCol="0" anchor="ctr"/>
+          <a:lstStyle/>
+          <a:p>
+            <a:pPr algn="ctr"/>
+          </a:p>
+        </p:txBody>
+      </p:sp>
+      <p:sp>
+        <p:nvSpPr>
+          <p:cNvPr id="9" name="Rounded Rectangle 8"/>
+          <p:cNvSpPr/>
+          <p:nvPr/>
+        </p:nvSpPr>
+        <p:spPr>
+          <a:xfrm>
+            <a:off x="3038394" y="1175265"/>
+            <a:ext cx="384048" cy="118872"/>
+          </a:xfrm>
+          <a:prstGeom prst="roundRect">
+            <a:avLst>
+              <a:gd name="adj" fmla="val 30769"/>
+            </a:avLst>
+          </a:prstGeom>
+          <a:solidFill>
+            <a:srgbClr val="FFFFFF"/>
+          </a:solidFill>
+          <a:ln w="6350">
+            <a:solidFill>
+              <a:srgbClr val="00A0E0"/>
+            </a:solidFill>
+          </a:ln>
+          <a:effectLst/>
+        </p:spPr>
+        <p:style>
+          <a:lnRef idx="1">
+            <a:schemeClr val="accent1"/>
+          </a:lnRef>
+          <a:fillRef idx="3">
+            <a:schemeClr val="accent1"/>
+          </a:fillRef>
+          <a:effectRef idx="2">
+            <a:schemeClr val="accent1"/>
+          </a:effectRef>
+          <a:fontRef idx="minor">
+            <a:schemeClr val="lt1"/>
+          </a:fontRef>
+        </p:style>
+        <p:txBody>
+          <a:bodyPr rtlCol="0" anchor="ctr" wrap="none" lIns="0" rIns="0" tIns="0" bIns="0">
+            <a:noAutofit/>
+          </a:bodyPr>
+          <a:lstStyle/>
+          <a:p>
+            <a:pPr algn="ctr">
+              <a:lnSpc>
+                <a:spcPct val="105000"/>
+              </a:lnSpc>
+            </a:pPr>
+            <a:r>
+              <a:rPr sz="600" b="0" i="0">
+                <a:solidFill>
+                  <a:srgbClr val="1F6FB2"/>
+                </a:solidFill>
+                <a:latin typeface="Times New Roman"/>
+              </a:rPr>
+              <a:t>Ethernet</a:t>
+            </a:r>
+          </a:p>
+        </p:txBody>
+      </p:sp>
       <p:cxnSp>
         <p:nvCxnSpPr>
           <p:cNvPr id="10" name="Connector 9"/>
@@ -3394,8 +3443,8 @@
         </p:nvCxnSpPr>
         <p:spPr>
           <a:xfrm>
-            <a:off x="3822729" y="493776"/>
-            <a:ext cx="0" cy="310896"/>
+            <a:off x="4041648" y="733463"/>
+            <a:ext cx="329183" cy="0"/>
           </a:xfrm>
           <a:prstGeom prst="line">
             <a:avLst/>
@@ -3405,80 +3454,7 @@
               <a:srgbClr val="00A0E0"/>
             </a:solidFill>
           </a:ln>
-        </p:spPr>
-        <p:style>
-          <a:lnRef idx="2">
-            <a:schemeClr val="accent1"/>
-          </a:lnRef>
-          <a:fillRef idx="0">
-            <a:schemeClr val="accent1"/>
-          </a:fillRef>
-          <a:effectRef idx="1">
-            <a:schemeClr val="accent1"/>
-          </a:effectRef>
-          <a:fontRef idx="minor">
-            <a:schemeClr val="tx1"/>
-          </a:fontRef>
-        </p:style>
-      </p:cxnSp>
-      <p:sp>
-        <p:nvSpPr>
-          <p:cNvPr id="11" name="TextBox 10"/>
-          <p:cNvSpPr txBox="1"/>
-          <p:nvPr/>
-        </p:nvSpPr>
-        <p:spPr>
-          <a:xfrm>
-            <a:off x="3859305" y="603504"/>
-            <a:ext cx="548640" cy="118872"/>
-          </a:xfrm>
-          <a:prstGeom prst="rect">
-            <a:avLst/>
-          </a:prstGeom>
-          <a:noFill/>
-        </p:spPr>
-        <p:txBody>
-          <a:bodyPr wrap="none" lIns="0" rIns="0" tIns="0" bIns="0" anchor="ctr">
-            <a:noAutofit/>
-          </a:bodyPr>
-          <a:lstStyle/>
-          <a:p>
-            <a:pPr algn="l">
-              <a:lnSpc>
-                <a:spcPct val="105000"/>
-              </a:lnSpc>
-            </a:pPr>
-            <a:r>
-              <a:rPr sz="600" b="0" i="0">
-                <a:solidFill>
-                  <a:srgbClr val="1F6FB2"/>
-                </a:solidFill>
-                <a:latin typeface="Times New Roman"/>
-              </a:rPr>
-              <a:t>Ethernet</a:t>
-            </a:r>
-          </a:p>
-        </p:txBody>
-      </p:sp>
-      <p:cxnSp>
-        <p:nvCxnSpPr>
-          <p:cNvPr id="12" name="Connector 11"/>
-          <p:cNvCxnSpPr/>
-          <p:nvPr/>
-        </p:nvCxnSpPr>
-        <p:spPr>
-          <a:xfrm>
-            <a:off x="4041648" y="1026071"/>
-            <a:ext cx="329183" cy="0"/>
-          </a:xfrm>
-          <a:prstGeom prst="line">
-            <a:avLst/>
-          </a:prstGeom>
-          <a:ln w="16510">
-            <a:solidFill>
-              <a:srgbClr val="00A0E0"/>
-            </a:solidFill>
-          </a:ln>
+          <a:effectLst/>
         </p:spPr>
         <p:style>
           <a:lnRef idx="2">
@@ -3497,7 +3473,70 @@
       </p:cxnSp>
       <p:pic>
         <p:nvPicPr>
-          <p:cNvPr id="13" name="can_converter" descr="can.jpg"/>
+          <p:cNvPr id="11" name="can_converter" descr="can.jpg"/>
+          <p:cNvPicPr>
+            <a:picLocks noChangeAspect="1"/>
+          </p:cNvPicPr>
+          <p:nvPr/>
+        </p:nvPicPr>
+        <p:blipFill>
+          <a:blip r:embed="rId4"/>
+          <a:stretch>
+            <a:fillRect/>
+          </a:stretch>
+        </p:blipFill>
+        <p:spPr>
+          <a:xfrm>
+            <a:off x="4535424" y="274320"/>
+            <a:ext cx="420624" cy="426195"/>
+          </a:xfrm>
+          <a:prstGeom prst="rect">
+            <a:avLst/>
+          </a:prstGeom>
+        </p:spPr>
+      </p:pic>
+      <p:sp>
+        <p:nvSpPr>
+          <p:cNvPr id="12" name="TextBox 11"/>
+          <p:cNvSpPr txBox="1"/>
+          <p:nvPr/>
+        </p:nvSpPr>
+        <p:spPr>
+          <a:xfrm>
+            <a:off x="4398264" y="718803"/>
+            <a:ext cx="694944" cy="118872"/>
+          </a:xfrm>
+          <a:prstGeom prst="rect">
+            <a:avLst/>
+          </a:prstGeom>
+          <a:noFill/>
+        </p:spPr>
+        <p:txBody>
+          <a:bodyPr wrap="none" lIns="0" rIns="0" tIns="0" bIns="0" anchor="ctr">
+            <a:noAutofit/>
+          </a:bodyPr>
+          <a:lstStyle/>
+          <a:p>
+            <a:pPr algn="ctr">
+              <a:lnSpc>
+                <a:spcPct val="105000"/>
+              </a:lnSpc>
+            </a:pPr>
+            <a:r>
+              <a:rPr sz="640" b="1" i="0">
+                <a:solidFill>
+                  <a:srgbClr val="000000"/>
+                </a:solidFill>
+                <a:latin typeface="Times New Roman"/>
+              </a:rPr>
+              <a:t>CAN converter</a:t>
+            </a:r>
+          </a:p>
+        </p:txBody>
+      </p:sp>
+      <p:pic>
+        <p:nvPicPr>
+          <p:cNvPr id="13" name="servo_cylinder" descr="servo.jpg"/>
           <p:cNvPicPr>
             <a:picLocks noChangeAspect="1"/>
           </p:cNvPicPr>
@@ -3511,8 +3550,8 @@
         </p:blipFill>
         <p:spPr>
           <a:xfrm>
-            <a:off x="4535424" y="658368"/>
-            <a:ext cx="420624" cy="426195"/>
+            <a:off x="4535424" y="914400"/>
+            <a:ext cx="731520" cy="371784"/>
           </a:xfrm>
           <a:prstGeom prst="rect">
             <a:avLst/>
@@ -3527,70 +3566,7 @@
         </p:nvSpPr>
         <p:spPr>
           <a:xfrm>
-            <a:off x="4398264" y="1102851"/>
-            <a:ext cx="694944" cy="118872"/>
-          </a:xfrm>
-          <a:prstGeom prst="rect">
-            <a:avLst/>
-          </a:prstGeom>
-          <a:noFill/>
-        </p:spPr>
-        <p:txBody>
-          <a:bodyPr wrap="none" lIns="0" rIns="0" tIns="0" bIns="0" anchor="ctr">
-            <a:noAutofit/>
-          </a:bodyPr>
-          <a:lstStyle/>
-          <a:p>
-            <a:pPr algn="ctr">
-              <a:lnSpc>
-                <a:spcPct val="105000"/>
-              </a:lnSpc>
-            </a:pPr>
-            <a:r>
-              <a:rPr sz="640" b="1" i="0">
-                <a:solidFill>
-                  <a:srgbClr val="000000"/>
-                </a:solidFill>
-                <a:latin typeface="Times New Roman"/>
-              </a:rPr>
-              <a:t>CAN converter</a:t>
-            </a:r>
-          </a:p>
-        </p:txBody>
-      </p:sp>
-      <p:pic>
-        <p:nvPicPr>
-          <p:cNvPr id="15" name="servo_cylinder" descr="servo.jpg"/>
-          <p:cNvPicPr>
-            <a:picLocks noChangeAspect="1"/>
-          </p:cNvPicPr>
-          <p:nvPr/>
-        </p:nvPicPr>
-        <p:blipFill>
-          <a:blip r:embed="rId6"/>
-          <a:stretch>
-            <a:fillRect/>
-          </a:stretch>
-        </p:blipFill>
-        <p:spPr>
-          <a:xfrm>
-            <a:off x="4535424" y="1298448"/>
-            <a:ext cx="731520" cy="371784"/>
-          </a:xfrm>
-          <a:prstGeom prst="rect">
-            <a:avLst/>
-          </a:prstGeom>
-        </p:spPr>
-      </p:pic>
-      <p:sp>
-        <p:nvSpPr>
-          <p:cNvPr id="16" name="TextBox 15"/>
-          <p:cNvSpPr txBox="1"/>
-          <p:nvPr/>
-        </p:nvSpPr>
-        <p:spPr>
-          <a:xfrm>
-            <a:off x="4443984" y="1688520"/>
+            <a:off x="4443984" y="1304472"/>
             <a:ext cx="914400" cy="118872"/>
           </a:xfrm>
           <a:prstGeom prst="rect">
@@ -3623,13 +3599,13 @@
       </p:sp>
       <p:cxnSp>
         <p:nvCxnSpPr>
-          <p:cNvPr id="17" name="Connector 16"/>
+          <p:cNvPr id="15" name="Connector 14"/>
           <p:cNvCxnSpPr/>
           <p:nvPr/>
         </p:nvCxnSpPr>
         <p:spPr>
           <a:xfrm>
-            <a:off x="4370831" y="871465"/>
+            <a:off x="4370831" y="487417"/>
             <a:ext cx="0" cy="612875"/>
           </a:xfrm>
           <a:prstGeom prst="line">
@@ -3640,6 +3616,7 @@
               <a:srgbClr val="00A0E0"/>
             </a:solidFill>
           </a:ln>
+          <a:effectLst/>
         </p:spPr>
         <p:style>
           <a:lnRef idx="2">
@@ -3658,13 +3635,13 @@
       </p:cxnSp>
       <p:cxnSp>
         <p:nvCxnSpPr>
-          <p:cNvPr id="18" name="Connector 17"/>
+          <p:cNvPr id="16" name="Connector 15"/>
           <p:cNvCxnSpPr/>
           <p:nvPr/>
         </p:nvCxnSpPr>
         <p:spPr>
           <a:xfrm>
-            <a:off x="4370831" y="871465"/>
+            <a:off x="4370831" y="487417"/>
             <a:ext cx="164593" cy="0"/>
           </a:xfrm>
           <a:prstGeom prst="line">
@@ -3676,6 +3653,7 @@
             </a:solidFill>
             <a:tailEnd type="triangle" w="sm" len="sm"/>
           </a:ln>
+          <a:effectLst/>
         </p:spPr>
         <p:style>
           <a:lnRef idx="2">
@@ -3694,13 +3672,13 @@
       </p:cxnSp>
       <p:cxnSp>
         <p:nvCxnSpPr>
-          <p:cNvPr id="19" name="Connector 18"/>
+          <p:cNvPr id="17" name="Connector 16"/>
           <p:cNvCxnSpPr/>
           <p:nvPr/>
         </p:nvCxnSpPr>
         <p:spPr>
           <a:xfrm>
-            <a:off x="4370831" y="1484340"/>
+            <a:off x="4370831" y="1100292"/>
             <a:ext cx="164593" cy="0"/>
           </a:xfrm>
           <a:prstGeom prst="line">
@@ -3712,6 +3690,7 @@
             </a:solidFill>
             <a:tailEnd type="triangle" w="sm" len="sm"/>
           </a:ln>
+          <a:effectLst/>
         </p:spPr>
         <p:style>
           <a:lnRef idx="2">
@@ -3730,13 +3709,13 @@
       </p:cxnSp>
       <p:sp>
         <p:nvSpPr>
-          <p:cNvPr id="20" name="TextBox 19"/>
+          <p:cNvPr id="18" name="TextBox 17"/>
           <p:cNvSpPr txBox="1"/>
           <p:nvPr/>
         </p:nvSpPr>
         <p:spPr>
           <a:xfrm>
-            <a:off x="4069079" y="734305"/>
+            <a:off x="4069079" y="350257"/>
             <a:ext cx="292608" cy="118872"/>
           </a:xfrm>
           <a:prstGeom prst="rect">
@@ -3769,13 +3748,13 @@
       </p:sp>
       <p:sp>
         <p:nvSpPr>
-          <p:cNvPr id="21" name="TextBox 20"/>
+          <p:cNvPr id="19" name="TextBox 18"/>
           <p:cNvSpPr txBox="1"/>
           <p:nvPr/>
         </p:nvSpPr>
         <p:spPr>
           <a:xfrm>
-            <a:off x="3867911" y="1502628"/>
+            <a:off x="3867911" y="1118580"/>
             <a:ext cx="475488" cy="118872"/>
           </a:xfrm>
           <a:prstGeom prst="rect">
@@ -3808,22 +3787,22 @@
       </p:sp>
       <p:pic>
         <p:nvPicPr>
-          <p:cNvPr id="22" name="engine_sterndrive" descr="engine.jpg"/>
+          <p:cNvPr id="20" name="sterndrive_thruster" descr="thruster.jpg"/>
           <p:cNvPicPr>
             <a:picLocks noChangeAspect="1"/>
           </p:cNvPicPr>
           <p:nvPr/>
         </p:nvPicPr>
         <p:blipFill>
-          <a:blip r:embed="rId7"/>
+          <a:blip r:embed="rId6"/>
           <a:stretch>
             <a:fillRect/>
           </a:stretch>
         </p:blipFill>
         <p:spPr>
           <a:xfrm>
-            <a:off x="5614416" y="822960"/>
-            <a:ext cx="804672" cy="618816"/>
+            <a:off x="5522976" y="493776"/>
+            <a:ext cx="896112" cy="559901"/>
           </a:xfrm>
           <a:prstGeom prst="rect">
             <a:avLst/>
@@ -3832,14 +3811,14 @@
       </p:pic>
       <p:sp>
         <p:nvSpPr>
-          <p:cNvPr id="23" name="Freeform 22"/>
+          <p:cNvPr id="21" name="Freeform 20"/>
           <p:cNvSpPr/>
           <p:nvPr/>
         </p:nvSpPr>
         <p:spPr>
           <a:xfrm>
-            <a:off x="4956048" y="822960"/>
-            <a:ext cx="940003" cy="48505"/>
+            <a:off x="4956048" y="487417"/>
+            <a:ext cx="1122517" cy="6359"/>
           </a:xfrm>
           <a:custGeom>
             <a:avLst/>
@@ -3848,15 +3827,15 @@
             <a:cxnLst/>
             <a:rect l="l" t="t" r="r" b="b"/>
             <a:pathLst>
-              <a:path w="940003" h="48505">
+              <a:path w="1122517" h="6359">
                 <a:moveTo>
-                  <a:pt x="0" y="48505"/>
+                  <a:pt x="0" y="0"/>
                 </a:moveTo>
                 <a:lnTo>
-                  <a:pt x="940003" y="48505"/>
+                  <a:pt x="1122517" y="0"/>
                 </a:lnTo>
                 <a:lnTo>
-                  <a:pt x="940003" y="0"/>
+                  <a:pt x="1122517" y="6359"/>
                 </a:lnTo>
               </a:path>
             </a:pathLst>
@@ -3894,13 +3873,13 @@
       </p:sp>
       <p:sp>
         <p:nvSpPr>
-          <p:cNvPr id="24" name="TextBox 23"/>
+          <p:cNvPr id="22" name="TextBox 21"/>
           <p:cNvSpPr txBox="1"/>
           <p:nvPr/>
         </p:nvSpPr>
         <p:spPr>
           <a:xfrm>
-            <a:off x="4992624" y="734305"/>
+            <a:off x="4992624" y="350257"/>
             <a:ext cx="365760" cy="118872"/>
           </a:xfrm>
           <a:prstGeom prst="rect">
@@ -3933,13 +3912,13 @@
       </p:sp>
       <p:sp>
         <p:nvSpPr>
-          <p:cNvPr id="25" name="TextBox 24"/>
+          <p:cNvPr id="23" name="TextBox 22"/>
           <p:cNvSpPr txBox="1"/>
           <p:nvPr/>
         </p:nvSpPr>
         <p:spPr>
           <a:xfrm>
-            <a:off x="5164531" y="576072"/>
+            <a:off x="5347045" y="331969"/>
             <a:ext cx="704088" cy="118872"/>
           </a:xfrm>
           <a:prstGeom prst="rect">
@@ -3972,14 +3951,14 @@
       </p:sp>
       <p:sp>
         <p:nvSpPr>
-          <p:cNvPr id="26" name="Freeform 25"/>
+          <p:cNvPr id="24" name="Freeform 23"/>
           <p:cNvSpPr/>
           <p:nvPr/>
         </p:nvSpPr>
         <p:spPr>
           <a:xfrm>
-            <a:off x="5266944" y="1441776"/>
-            <a:ext cx="991209" cy="134004"/>
+            <a:off x="5266944" y="1053677"/>
+            <a:ext cx="614476" cy="138055"/>
           </a:xfrm>
           <a:custGeom>
             <a:avLst/>
@@ -3988,15 +3967,15 @@
             <a:cxnLst/>
             <a:rect l="l" t="t" r="r" b="b"/>
             <a:pathLst>
-              <a:path w="991209" h="134004">
+              <a:path w="614476" h="138055">
                 <a:moveTo>
-                  <a:pt x="0" y="134004"/>
+                  <a:pt x="0" y="138055"/>
                 </a:moveTo>
                 <a:lnTo>
-                  <a:pt x="991209" y="134004"/>
+                  <a:pt x="614476" y="138055"/>
                 </a:lnTo>
                 <a:lnTo>
-                  <a:pt x="991209" y="0"/>
+                  <a:pt x="614476" y="0"/>
                 </a:lnTo>
               </a:path>
             </a:pathLst>
@@ -4034,13 +4013,13 @@
       </p:sp>
       <p:sp>
         <p:nvSpPr>
-          <p:cNvPr id="27" name="TextBox 26"/>
+          <p:cNvPr id="25" name="TextBox 24"/>
           <p:cNvSpPr txBox="1"/>
           <p:nvPr/>
         </p:nvSpPr>
         <p:spPr>
           <a:xfrm>
-            <a:off x="5321807" y="1603212"/>
+            <a:off x="5321807" y="1219164"/>
             <a:ext cx="1097280" cy="118872"/>
           </a:xfrm>
           <a:prstGeom prst="rect">
@@ -4073,13 +4052,13 @@
       </p:sp>
       <p:sp>
         <p:nvSpPr>
-          <p:cNvPr id="28" name="TextBox 27"/>
+          <p:cNvPr id="26" name="TextBox 25"/>
           <p:cNvSpPr txBox="1"/>
           <p:nvPr/>
         </p:nvSpPr>
         <p:spPr>
           <a:xfrm>
-            <a:off x="1508760" y="1938528"/>
+            <a:off x="1508760" y="1616882"/>
             <a:ext cx="365760" cy="128016"/>
           </a:xfrm>
           <a:prstGeom prst="rect">
@@ -4112,13 +4091,13 @@
       </p:sp>
       <p:sp>
         <p:nvSpPr>
-          <p:cNvPr id="29" name="TextBox 28"/>
+          <p:cNvPr id="27" name="TextBox 26"/>
           <p:cNvSpPr txBox="1"/>
           <p:nvPr/>
         </p:nvSpPr>
         <p:spPr>
           <a:xfrm>
-            <a:off x="4791455" y="1938528"/>
+            <a:off x="4791455" y="1616882"/>
             <a:ext cx="365760" cy="128016"/>
           </a:xfrm>
           <a:prstGeom prst="rect">
@@ -4343,42 +4322,13 @@
       </a:lnStyleLst>
       <a:effectStyleLst>
         <a:effectStyle>
-          <a:effectLst>
-            <a:outerShdw blurRad="40000" dist="20000" dir="5400000" rotWithShape="0">
-              <a:srgbClr val="000000">
-                <a:alpha val="38000"/>
-              </a:srgbClr>
-            </a:outerShdw>
-          </a:effectLst>
+          <a:effectLst/>
         </a:effectStyle>
         <a:effectStyle>
-          <a:effectLst>
-            <a:outerShdw blurRad="40000" dist="23000" dir="5400000" rotWithShape="0">
-              <a:srgbClr val="000000">
-                <a:alpha val="35000"/>
-              </a:srgbClr>
-            </a:outerShdw>
-          </a:effectLst>
+          <a:effectLst/>
         </a:effectStyle>
         <a:effectStyle>
-          <a:effectLst>
-            <a:outerShdw blurRad="40000" dist="23000" dir="5400000" rotWithShape="0">
-              <a:srgbClr val="000000">
-                <a:alpha val="35000"/>
-              </a:srgbClr>
-            </a:outerShdw>
-          </a:effectLst>
-          <a:scene3d>
-            <a:camera prst="orthographicFront">
-              <a:rot lat="0" lon="0" rev="0"/>
-            </a:camera>
-            <a:lightRig rig="threePt" dir="t">
-              <a:rot lat="0" lon="0" rev="1200000"/>
-            </a:lightRig>
-          </a:scene3d>
-          <a:sp3d>
-            <a:bevelT w="63500" h="25400"/>
-          </a:sp3d>
+          <a:effectLst/>
         </a:effectStyle>
       </a:effectStyleLst>
       <a:bgFillStyleLst>
